--- a/QML_Project_Raphael Probst.pptx
+++ b/QML_Project_Raphael Probst.pptx
@@ -1635,11 +1635,11 @@
             </a:lnSpc>
           </a:pPr>
           <a:r>
-            <a:rPr lang="en-US" b="1" dirty="0" err="1"/>
+            <a:rPr lang="en-GB" b="1" noProof="0" dirty="0" err="1"/>
             <a:t>Emotiv</a:t>
           </a:r>
           <a:r>
-            <a:rPr lang="en-US" b="1" dirty="0"/>
+            <a:rPr lang="en-GB" b="1" noProof="0" dirty="0"/>
             <a:t> EPOC Hardware</a:t>
           </a:r>
         </a:p>
@@ -1650,7 +1650,7 @@
             </a:lnSpc>
           </a:pPr>
           <a:r>
-            <a:rPr lang="en-US" dirty="0"/>
+            <a:rPr lang="en-GB" noProof="0" dirty="0"/>
             <a:t>Utilizes 14 channels sampling at 128Hz frequency.</a:t>
           </a:r>
         </a:p>
@@ -1691,7 +1691,7 @@
             </a:lnSpc>
           </a:pPr>
           <a:r>
-            <a:rPr lang="en-US" b="1" dirty="0"/>
+            <a:rPr lang="en-GB" b="1" noProof="0" dirty="0"/>
             <a:t>Scope Limit</a:t>
           </a:r>
         </a:p>
@@ -1702,7 +1702,7 @@
             </a:lnSpc>
           </a:pPr>
           <a:r>
-            <a:rPr lang="en-US" dirty="0"/>
+            <a:rPr lang="en-GB" noProof="0" dirty="0"/>
             <a:t>Focused strictly on digits 0–4 to establish a robust 5-class cognitive intent benchmark. </a:t>
           </a:r>
         </a:p>
@@ -1743,7 +1743,7 @@
             </a:lnSpc>
           </a:pPr>
           <a:r>
-            <a:rPr lang="en-US" b="1" dirty="0"/>
+            <a:rPr lang="en-GB" b="1" noProof="0" dirty="0"/>
             <a:t>Feature Extraction</a:t>
           </a:r>
         </a:p>
@@ -1754,10 +1754,10 @@
             </a:lnSpc>
           </a:pPr>
           <a:r>
-            <a:rPr lang="en-US" dirty="0"/>
+            <a:rPr lang="en-GB" noProof="0" dirty="0"/>
             <a:t>Extracted 112 classical statistical and frequency-domain attributes.</a:t>
           </a:r>
-          <a:endParaRPr lang="en-US" b="1" dirty="0"/>
+          <a:endParaRPr lang="en-GB" b="1" noProof="0" dirty="0"/>
         </a:p>
       </dgm:t>
     </dgm:pt>
@@ -1929,7 +1929,7 @@
             </a:lnSpc>
           </a:pPr>
           <a:r>
-            <a:rPr lang="de-CH" b="1" dirty="0"/>
+            <a:rPr lang="en-GB" b="1" noProof="0" dirty="0"/>
             <a:t>Quantum Encoding</a:t>
           </a:r>
         </a:p>
@@ -1940,7 +1940,7 @@
             </a:lnSpc>
           </a:pPr>
           <a:r>
-            <a:rPr lang="en-US" dirty="0"/>
+            <a:rPr lang="en-GB" noProof="0" dirty="0"/>
             <a:t>Maps the 112 extracted classical features onto an 8-qubit system.</a:t>
           </a:r>
         </a:p>
@@ -1952,7 +1952,7 @@
             <a:buNone/>
           </a:pPr>
           <a:r>
-            <a:rPr lang="en-US" dirty="0"/>
+            <a:rPr lang="en-GB" noProof="0" dirty="0"/>
             <a:t>Amplitude embedding projects the signals into a 256-dimensional Hilbert space.</a:t>
           </a:r>
         </a:p>
@@ -1993,7 +1993,7 @@
             </a:lnSpc>
           </a:pPr>
           <a:r>
-            <a:rPr lang="de-CH" b="1" dirty="0"/>
+            <a:rPr lang="en-GB" b="1" noProof="0" dirty="0"/>
             <a:t>Quantum Reservoir</a:t>
           </a:r>
         </a:p>
@@ -2004,7 +2004,7 @@
             </a:lnSpc>
           </a:pPr>
           <a:r>
-            <a:rPr lang="en-US" dirty="0"/>
+            <a:rPr lang="en-GB" noProof="0" dirty="0"/>
             <a:t>Fixed, untrained Depth-3 quantum circuit acts as a non-linear mixer.</a:t>
           </a:r>
         </a:p>
@@ -2016,7 +2016,7 @@
             <a:buNone/>
           </a:pPr>
           <a:r>
-            <a:rPr lang="en-US" dirty="0"/>
+            <a:rPr lang="en-GB" noProof="0" dirty="0"/>
             <a:t>Transforms raw features into high-dimensional quantum states without parameter training.</a:t>
           </a:r>
         </a:p>
@@ -2057,22 +2057,9 @@
             </a:lnSpc>
           </a:pPr>
           <a:r>
-            <a:rPr lang="de-CH" b="1" dirty="0"/>
-            <a:t>Ridge </a:t>
+            <a:rPr lang="en-GB" b="1" noProof="0" dirty="0"/>
+            <a:t>Ridge Classifier Readout</a:t>
           </a:r>
-          <a:r>
-            <a:rPr lang="de-CH" b="1" dirty="0" err="1"/>
-            <a:t>Classifier</a:t>
-          </a:r>
-          <a:r>
-            <a:rPr lang="de-CH" b="1" dirty="0"/>
-            <a:t> </a:t>
-          </a:r>
-          <a:r>
-            <a:rPr lang="de-CH" b="1" dirty="0" err="1"/>
-            <a:t>Readout</a:t>
-          </a:r>
-          <a:endParaRPr lang="de-CH" b="1" dirty="0"/>
         </a:p>
         <a:p>
           <a:pPr>
@@ -2081,15 +2068,15 @@
             </a:lnSpc>
           </a:pPr>
           <a:r>
-            <a:rPr lang="en-US" dirty="0"/>
+            <a:rPr lang="en-GB" noProof="0" dirty="0"/>
             <a:t>Applied a classical </a:t>
           </a:r>
           <a:r>
-            <a:rPr lang="en-US" b="0" dirty="0"/>
+            <a:rPr lang="en-GB" b="0" noProof="0" dirty="0"/>
             <a:t>Ridge Classifier </a:t>
           </a:r>
           <a:r>
-            <a:rPr lang="en-US" dirty="0"/>
+            <a:rPr lang="en-GB" noProof="0" dirty="0"/>
             <a:t>to the measured qubit expectation values.</a:t>
           </a:r>
         </a:p>
@@ -2101,7 +2088,7 @@
             <a:buNone/>
           </a:pPr>
           <a:r>
-            <a:rPr lang="en-US" dirty="0"/>
+            <a:rPr lang="en-GB" noProof="0" dirty="0"/>
             <a:t>Only this classical readout head is trained, bypassing expensive quantum gradient descent.</a:t>
           </a:r>
         </a:p>
@@ -2346,11 +2333,11 @@
             <a:buNone/>
           </a:pPr>
           <a:r>
-            <a:rPr lang="en-US" sz="1800" b="1" kern="1200" dirty="0" err="1"/>
+            <a:rPr lang="en-GB" sz="1800" b="1" kern="1200" noProof="0" dirty="0" err="1"/>
             <a:t>Emotiv</a:t>
           </a:r>
           <a:r>
-            <a:rPr lang="en-US" sz="1800" b="1" kern="1200" dirty="0"/>
+            <a:rPr lang="en-GB" sz="1800" b="1" kern="1200" noProof="0" dirty="0"/>
             <a:t> EPOC Hardware</a:t>
           </a:r>
         </a:p>
@@ -2368,7 +2355,7 @@
             <a:buNone/>
           </a:pPr>
           <a:r>
-            <a:rPr lang="en-US" sz="1800" kern="1200" dirty="0"/>
+            <a:rPr lang="en-GB" sz="1800" kern="1200" noProof="0" dirty="0"/>
             <a:t>Utilizes 14 channels sampling at 128Hz frequency.</a:t>
           </a:r>
         </a:p>
@@ -2497,7 +2484,7 @@
             <a:buNone/>
           </a:pPr>
           <a:r>
-            <a:rPr lang="en-US" sz="1800" b="1" kern="1200" dirty="0"/>
+            <a:rPr lang="en-GB" sz="1800" b="1" kern="1200" noProof="0" dirty="0"/>
             <a:t>Scope Limit</a:t>
           </a:r>
         </a:p>
@@ -2515,7 +2502,7 @@
             <a:buNone/>
           </a:pPr>
           <a:r>
-            <a:rPr lang="en-US" sz="1800" kern="1200" dirty="0"/>
+            <a:rPr lang="en-GB" sz="1800" kern="1200" noProof="0" dirty="0"/>
             <a:t>Focused strictly on digits 0–4 to establish a robust 5-class cognitive intent benchmark. </a:t>
           </a:r>
         </a:p>
@@ -2644,7 +2631,7 @@
             <a:buNone/>
           </a:pPr>
           <a:r>
-            <a:rPr lang="en-US" sz="1800" b="1" kern="1200" dirty="0"/>
+            <a:rPr lang="en-GB" sz="1800" b="1" kern="1200" noProof="0" dirty="0"/>
             <a:t>Feature Extraction</a:t>
           </a:r>
         </a:p>
@@ -2662,10 +2649,10 @@
             <a:buNone/>
           </a:pPr>
           <a:r>
-            <a:rPr lang="en-US" sz="1800" kern="1200" dirty="0"/>
+            <a:rPr lang="en-GB" sz="1800" kern="1200" noProof="0" dirty="0"/>
             <a:t>Extracted 112 classical statistical and frequency-domain attributes.</a:t>
           </a:r>
-          <a:endParaRPr lang="en-US" sz="1800" b="1" kern="1200" dirty="0"/>
+          <a:endParaRPr lang="en-GB" sz="1800" b="1" kern="1200" noProof="0" dirty="0"/>
         </a:p>
       </dsp:txBody>
       <dsp:txXfrm>
@@ -2784,7 +2771,7 @@
             <a:buNone/>
           </a:pPr>
           <a:r>
-            <a:rPr lang="de-CH" sz="1900" b="1" kern="1200" dirty="0"/>
+            <a:rPr lang="en-GB" sz="1900" b="1" kern="1200" noProof="0" dirty="0"/>
             <a:t>Quantum Encoding</a:t>
           </a:r>
         </a:p>
@@ -2802,7 +2789,7 @@
             <a:buNone/>
           </a:pPr>
           <a:r>
-            <a:rPr lang="en-US" sz="1900" kern="1200" dirty="0"/>
+            <a:rPr lang="en-GB" sz="1900" kern="1200" noProof="0" dirty="0"/>
             <a:t>Maps the 112 extracted classical features onto an 8-qubit system.</a:t>
           </a:r>
         </a:p>
@@ -2820,7 +2807,7 @@
             <a:buNone/>
           </a:pPr>
           <a:r>
-            <a:rPr lang="en-US" sz="1900" kern="1200" dirty="0"/>
+            <a:rPr lang="en-GB" sz="1900" kern="1200" noProof="0" dirty="0"/>
             <a:t>Amplitude embedding projects the signals into a 256-dimensional Hilbert space.</a:t>
           </a:r>
         </a:p>
@@ -2929,7 +2916,7 @@
             <a:buNone/>
           </a:pPr>
           <a:r>
-            <a:rPr lang="de-CH" sz="1900" b="1" kern="1200" dirty="0"/>
+            <a:rPr lang="en-GB" sz="1900" b="1" kern="1200" noProof="0" dirty="0"/>
             <a:t>Quantum Reservoir</a:t>
           </a:r>
         </a:p>
@@ -2947,7 +2934,7 @@
             <a:buNone/>
           </a:pPr>
           <a:r>
-            <a:rPr lang="en-US" sz="1900" kern="1200" dirty="0"/>
+            <a:rPr lang="en-GB" sz="1900" kern="1200" noProof="0" dirty="0"/>
             <a:t>Fixed, untrained Depth-3 quantum circuit acts as a non-linear mixer.</a:t>
           </a:r>
         </a:p>
@@ -2965,7 +2952,7 @@
             <a:buNone/>
           </a:pPr>
           <a:r>
-            <a:rPr lang="en-US" sz="1900" kern="1200" dirty="0"/>
+            <a:rPr lang="en-GB" sz="1900" kern="1200" noProof="0" dirty="0"/>
             <a:t>Transforms raw features into high-dimensional quantum states without parameter training.</a:t>
           </a:r>
         </a:p>
@@ -3074,22 +3061,9 @@
             <a:buNone/>
           </a:pPr>
           <a:r>
-            <a:rPr lang="de-CH" sz="1900" b="1" kern="1200" dirty="0"/>
-            <a:t>Ridge </a:t>
+            <a:rPr lang="en-GB" sz="1900" b="1" kern="1200" noProof="0" dirty="0"/>
+            <a:t>Ridge Classifier Readout</a:t>
           </a:r>
-          <a:r>
-            <a:rPr lang="de-CH" sz="1900" b="1" kern="1200" dirty="0" err="1"/>
-            <a:t>Classifier</a:t>
-          </a:r>
-          <a:r>
-            <a:rPr lang="de-CH" sz="1900" b="1" kern="1200" dirty="0"/>
-            <a:t> </a:t>
-          </a:r>
-          <a:r>
-            <a:rPr lang="de-CH" sz="1900" b="1" kern="1200" dirty="0" err="1"/>
-            <a:t>Readout</a:t>
-          </a:r>
-          <a:endParaRPr lang="de-CH" sz="1900" b="1" kern="1200" dirty="0"/>
         </a:p>
         <a:p>
           <a:pPr marL="0" lvl="0" indent="0" algn="l" defTabSz="844550">
@@ -3105,15 +3079,15 @@
             <a:buNone/>
           </a:pPr>
           <a:r>
-            <a:rPr lang="en-US" sz="1900" kern="1200" dirty="0"/>
+            <a:rPr lang="en-GB" sz="1900" kern="1200" noProof="0" dirty="0"/>
             <a:t>Applied a classical </a:t>
           </a:r>
           <a:r>
-            <a:rPr lang="en-US" sz="1900" b="0" kern="1200" dirty="0"/>
+            <a:rPr lang="en-GB" sz="1900" b="0" kern="1200" noProof="0" dirty="0"/>
             <a:t>Ridge Classifier </a:t>
           </a:r>
           <a:r>
-            <a:rPr lang="en-US" sz="1900" kern="1200" dirty="0"/>
+            <a:rPr lang="en-GB" sz="1900" kern="1200" noProof="0" dirty="0"/>
             <a:t>to the measured qubit expectation values.</a:t>
           </a:r>
         </a:p>
@@ -3131,7 +3105,7 @@
             <a:buNone/>
           </a:pPr>
           <a:r>
-            <a:rPr lang="en-US" sz="1900" kern="1200" dirty="0"/>
+            <a:rPr lang="en-GB" sz="1900" kern="1200" noProof="0" dirty="0"/>
             <a:t>Only this classical readout head is trained, bypassing expensive quantum gradient descent.</a:t>
           </a:r>
         </a:p>
@@ -6636,7 +6610,7 @@
           <a:bodyPr/>
           <a:lstStyle/>
           <a:p>
-            <a:endParaRPr lang="de-CH"/>
+            <a:endParaRPr lang="de-CH" dirty="0"/>
           </a:p>
         </p:txBody>
       </p:sp>
@@ -10808,7 +10782,7 @@
           <a:lstStyle/>
           <a:p>
             <a:r>
-              <a:rPr lang="en-GB" b="1" noProof="0"/>
+              <a:rPr lang="en-GB" b="1" noProof="0" dirty="0" err="1"/>
               <a:t>MindBigData</a:t>
             </a:r>
             <a:endParaRPr lang="en-GB" noProof="0" dirty="0"/>
@@ -10831,7 +10805,7 @@
             <p:ph idx="1"/>
             <p:extLst>
               <p:ext uri="{D42A27DB-BD31-4B8C-83A1-F6EECF244321}">
-                <p14:modId xmlns:p14="http://schemas.microsoft.com/office/powerpoint/2010/main" val="1766808146"/>
+                <p14:modId xmlns:p14="http://schemas.microsoft.com/office/powerpoint/2010/main" val="2527017770"/>
               </p:ext>
             </p:extLst>
           </p:nvPr>
@@ -10875,9 +10849,14 @@
               </a:spcAft>
             </a:pPr>
             <a:r>
-              <a:rPr lang="en-GB" noProof="0"/>
-              <a:t>Raphael Probst | probsrap@students.zhaw.zh</a:t>
+              <a:rPr lang="en-GB" noProof="0" dirty="0"/>
+              <a:t>Raphael Probst | </a:t>
             </a:r>
+            <a:r>
+              <a:rPr lang="en-GB" noProof="0" dirty="0" err="1"/>
+              <a:t>probsrap@students.zhaw.zh</a:t>
+            </a:r>
+            <a:endParaRPr lang="en-GB" noProof="0" dirty="0"/>
           </a:p>
         </p:txBody>
       </p:sp>
@@ -10949,18 +10928,9 @@
           <a:lstStyle/>
           <a:p>
             <a:r>
-              <a:rPr lang="de-CH" dirty="0"/>
-              <a:t>Reservoir &amp; </a:t>
+              <a:rPr lang="en-GB" noProof="0" dirty="0"/>
+              <a:t>Reservoir &amp; Readout Setup</a:t>
             </a:r>
-            <a:r>
-              <a:rPr lang="de-CH" dirty="0" err="1"/>
-              <a:t>Readout</a:t>
-            </a:r>
-            <a:r>
-              <a:rPr lang="de-CH" dirty="0"/>
-              <a:t> Setup</a:t>
-            </a:r>
-            <a:endParaRPr lang="en-GB" noProof="0" dirty="0"/>
           </a:p>
         </p:txBody>
       </p:sp>
@@ -10980,7 +10950,7 @@
             <p:ph idx="1"/>
             <p:extLst>
               <p:ext uri="{D42A27DB-BD31-4B8C-83A1-F6EECF244321}">
-                <p14:modId xmlns:p14="http://schemas.microsoft.com/office/powerpoint/2010/main" val="3576357719"/>
+                <p14:modId xmlns:p14="http://schemas.microsoft.com/office/powerpoint/2010/main" val="1356397092"/>
               </p:ext>
             </p:extLst>
           </p:nvPr>
@@ -11024,9 +10994,14 @@
               </a:spcAft>
             </a:pPr>
             <a:r>
-              <a:rPr lang="en-GB" noProof="0"/>
-              <a:t>Raphael Probst | probsrap@students.zhaw.zh</a:t>
+              <a:rPr lang="en-GB" noProof="0" dirty="0"/>
+              <a:t>Raphael Probst | </a:t>
             </a:r>
+            <a:r>
+              <a:rPr lang="en-GB" noProof="0" dirty="0" err="1"/>
+              <a:t>probsrap@students.zhaw.zh</a:t>
+            </a:r>
+            <a:endParaRPr lang="en-GB" noProof="0" dirty="0"/>
           </a:p>
         </p:txBody>
       </p:sp>
@@ -11092,7 +11067,7 @@
           <a:lstStyle/>
           <a:p>
             <a:r>
-              <a:rPr lang="en-US" dirty="0"/>
+              <a:rPr lang="en-GB" noProof="0" dirty="0"/>
               <a:t>Experimental Results</a:t>
             </a:r>
           </a:p>
@@ -11127,31 +11102,31 @@
           <a:lstStyle/>
           <a:p>
             <a:r>
-              <a:rPr lang="en-US" b="1" dirty="0"/>
+              <a:rPr lang="en-GB" b="1" noProof="0" dirty="0"/>
               <a:t>Class Distribution:</a:t>
             </a:r>
             <a:r>
-              <a:rPr lang="en-US" dirty="0"/>
+              <a:rPr lang="en-GB" noProof="0" dirty="0"/>
               <a:t> Visualizes the true vs. predicted classifications across all 5 cognitive intent classes (digits 0–4).</a:t>
             </a:r>
           </a:p>
           <a:p>
             <a:r>
-              <a:rPr lang="en-US" b="1" dirty="0"/>
+              <a:rPr lang="en-GB" b="1" noProof="0" dirty="0"/>
               <a:t>Bias Detection:</a:t>
             </a:r>
             <a:r>
-              <a:rPr lang="en-US" dirty="0"/>
+              <a:rPr lang="en-GB" noProof="0" dirty="0"/>
               <a:t> Highlights a clear prediction tendency towards classes 0 and 3, which helps explain the performance bottlenecks in chaotic raw EEG data.</a:t>
             </a:r>
           </a:p>
           <a:p>
             <a:r>
-              <a:rPr lang="en-US" b="1" dirty="0"/>
+              <a:rPr lang="en-GB" b="1" noProof="0" dirty="0"/>
               <a:t>Model Validation:</a:t>
             </a:r>
             <a:r>
-              <a:rPr lang="en-US" dirty="0"/>
+              <a:rPr lang="en-GB" noProof="0" dirty="0"/>
               <a:t> Accuracy remained close to the random guessing baseline.</a:t>
             </a:r>
           </a:p>
@@ -11186,13 +11161,26 @@
               </a:spcAft>
             </a:pPr>
             <a:r>
-              <a:rPr lang="en-US" kern="1200" cap="all" baseline="0">
+              <a:rPr lang="en-GB" kern="1200" cap="all" baseline="0" noProof="0" dirty="0">
                 <a:latin typeface="+mn-lt"/>
                 <a:ea typeface="+mn-ea"/>
                 <a:cs typeface="+mn-cs"/>
               </a:rPr>
-              <a:t>Raphael Probst | probsrap@students.zhaw.zh</a:t>
+              <a:t>Raphael Probst | </a:t>
             </a:r>
+            <a:r>
+              <a:rPr lang="en-GB" kern="1200" cap="all" baseline="0" noProof="0" dirty="0" err="1">
+                <a:latin typeface="+mn-lt"/>
+                <a:ea typeface="+mn-ea"/>
+                <a:cs typeface="+mn-cs"/>
+              </a:rPr>
+              <a:t>probsrap@students.zhaw.zh</a:t>
+            </a:r>
+            <a:endParaRPr lang="en-GB" kern="1200" cap="all" baseline="0" noProof="0" dirty="0">
+              <a:latin typeface="+mn-lt"/>
+              <a:ea typeface="+mn-ea"/>
+              <a:cs typeface="+mn-cs"/>
+            </a:endParaRPr>
           </a:p>
         </p:txBody>
       </p:sp>
@@ -11321,7 +11309,7 @@
           <a:lstStyle/>
           <a:p>
             <a:pPr algn="ctr"/>
-            <a:endParaRPr lang="en-US"/>
+            <a:endParaRPr lang="en-GB" noProof="0" dirty="0"/>
           </a:p>
         </p:txBody>
       </p:sp>
@@ -11385,7 +11373,7 @@
           <a:bodyPr/>
           <a:lstStyle/>
           <a:p>
-            <a:endParaRPr lang="de-CH"/>
+            <a:endParaRPr lang="en-GB" noProof="0" dirty="0"/>
           </a:p>
         </p:txBody>
       </p:sp>
@@ -11418,7 +11406,7 @@
           <a:lstStyle/>
           <a:p>
             <a:r>
-              <a:rPr lang="de-CH" sz="3600">
+              <a:rPr lang="en-GB" sz="3600" noProof="0" dirty="0">
                 <a:solidFill>
                   <a:srgbClr val="FFFFFF"/>
                 </a:solidFill>
@@ -11486,7 +11474,7 @@
           <a:bodyPr/>
           <a:lstStyle/>
           <a:p>
-            <a:endParaRPr lang="de-CH"/>
+            <a:endParaRPr lang="en-GB" noProof="0" dirty="0"/>
           </a:p>
         </p:txBody>
       </p:sp>
@@ -11522,14 +11510,9 @@
               <a:buNone/>
             </a:pPr>
             <a:r>
-              <a:rPr lang="de-CH" dirty="0"/>
-              <a:t>Hardware Limits &amp; </a:t>
+              <a:rPr lang="en-GB" noProof="0" dirty="0"/>
+              <a:t>Hardware Limits &amp; Preprocessing</a:t>
             </a:r>
-            <a:r>
-              <a:rPr lang="de-CH" dirty="0" err="1"/>
-              <a:t>Preprocessing</a:t>
-            </a:r>
-            <a:endParaRPr lang="de-CH" dirty="0"/>
           </a:p>
           <a:p>
             <a:pPr lvl="1">
@@ -11537,7 +11520,7 @@
               <a:buChar char="•"/>
             </a:pPr>
             <a:r>
-              <a:rPr lang="en-US" dirty="0"/>
+              <a:rPr lang="en-GB" noProof="0" dirty="0"/>
               <a:t>Raw, full-length EEG waveforms cannot be handled directly by current quantum systems because the required qubit count and circuit depth scale too rapidly.</a:t>
             </a:r>
           </a:p>
@@ -11547,7 +11530,7 @@
               <a:buChar char="•"/>
             </a:pPr>
             <a:r>
-              <a:rPr lang="en-US" dirty="0"/>
+              <a:rPr lang="en-GB" noProof="0" dirty="0"/>
               <a:t>While the 112 extracted features bypassed this bottleneck, close-to-baseline results indicate that mapping complex biological signals into Hilbert space requires more structured temporal embeddings.</a:t>
             </a:r>
           </a:p>
@@ -11556,7 +11539,7 @@
               <a:buNone/>
             </a:pPr>
             <a:r>
-              <a:rPr lang="de-CH" dirty="0"/>
+              <a:rPr lang="en-GB" noProof="0" dirty="0"/>
               <a:t>Hybrid QRC Efficiency</a:t>
             </a:r>
           </a:p>
@@ -11566,116 +11549,8 @@
               <a:buChar char="•"/>
             </a:pPr>
             <a:r>
-              <a:rPr lang="de-CH" dirty="0" err="1"/>
-              <a:t>Combining</a:t>
-            </a:r>
-            <a:r>
-              <a:rPr lang="de-CH" dirty="0"/>
-              <a:t> an </a:t>
-            </a:r>
-            <a:r>
-              <a:rPr lang="de-CH" dirty="0" err="1"/>
-              <a:t>untrained</a:t>
-            </a:r>
-            <a:r>
-              <a:rPr lang="de-CH" dirty="0"/>
-              <a:t> </a:t>
-            </a:r>
-            <a:r>
-              <a:rPr lang="de-CH" dirty="0" err="1"/>
-              <a:t>quantum</a:t>
-            </a:r>
-            <a:r>
-              <a:rPr lang="de-CH" dirty="0"/>
-              <a:t> </a:t>
-            </a:r>
-            <a:r>
-              <a:rPr lang="de-CH" dirty="0" err="1"/>
-              <a:t>reservoir</a:t>
-            </a:r>
-            <a:r>
-              <a:rPr lang="de-CH" dirty="0"/>
-              <a:t> </a:t>
-            </a:r>
-            <a:r>
-              <a:rPr lang="de-CH" dirty="0" err="1"/>
-              <a:t>mixer</a:t>
-            </a:r>
-            <a:r>
-              <a:rPr lang="de-CH" dirty="0"/>
-              <a:t> </a:t>
-            </a:r>
-            <a:r>
-              <a:rPr lang="de-CH" dirty="0" err="1"/>
-              <a:t>with</a:t>
-            </a:r>
-            <a:r>
-              <a:rPr lang="de-CH" dirty="0"/>
-              <a:t> a </a:t>
-            </a:r>
-            <a:r>
-              <a:rPr lang="de-CH" dirty="0" err="1"/>
-              <a:t>classical</a:t>
-            </a:r>
-            <a:r>
-              <a:rPr lang="de-CH" dirty="0"/>
-              <a:t> Ridge </a:t>
-            </a:r>
-            <a:r>
-              <a:rPr lang="de-CH" dirty="0" err="1"/>
-              <a:t>Classifier</a:t>
-            </a:r>
-            <a:r>
-              <a:rPr lang="de-CH" dirty="0"/>
-              <a:t> </a:t>
-            </a:r>
-            <a:r>
-              <a:rPr lang="de-CH" dirty="0" err="1"/>
-              <a:t>readout</a:t>
-            </a:r>
-            <a:r>
-              <a:rPr lang="de-CH" dirty="0"/>
-              <a:t> </a:t>
-            </a:r>
-            <a:r>
-              <a:rPr lang="de-CH" dirty="0" err="1"/>
-              <a:t>worked</a:t>
-            </a:r>
-            <a:r>
-              <a:rPr lang="de-CH" dirty="0"/>
-              <a:t> </a:t>
-            </a:r>
-            <a:r>
-              <a:rPr lang="de-CH" dirty="0" err="1"/>
-              <a:t>flawlessly</a:t>
-            </a:r>
-            <a:r>
-              <a:rPr lang="de-CH" dirty="0"/>
-              <a:t> </a:t>
-            </a:r>
-            <a:r>
-              <a:rPr lang="de-CH" dirty="0" err="1"/>
-              <a:t>from</a:t>
-            </a:r>
-            <a:r>
-              <a:rPr lang="de-CH" dirty="0"/>
-              <a:t> an </a:t>
-            </a:r>
-            <a:r>
-              <a:rPr lang="de-CH" dirty="0" err="1"/>
-              <a:t>execution</a:t>
-            </a:r>
-            <a:r>
-              <a:rPr lang="de-CH" dirty="0"/>
-              <a:t> </a:t>
-            </a:r>
-            <a:r>
-              <a:rPr lang="de-CH" dirty="0" err="1"/>
-              <a:t>standpoint</a:t>
-            </a:r>
-            <a:r>
-              <a:rPr lang="de-CH" dirty="0"/>
-              <a:t>.</a:t>
+              <a:rPr lang="en-GB" noProof="0" dirty="0"/>
+              <a:t>Combining an untrained quantum reservoir mixer with a classical Ridge Classifier readout worked flawlessly from an execution standpoint.</a:t>
             </a:r>
           </a:p>
           <a:p>
@@ -11684,108 +11559,12 @@
               <a:buChar char="•"/>
             </a:pPr>
             <a:r>
-              <a:rPr lang="de-CH" dirty="0"/>
-              <a:t>Bypasses expensive </a:t>
+              <a:rPr lang="en-GB" noProof="0" dirty="0"/>
+              <a:t>Bypasses expensive quantum gradient descent entirely, offering a highly efficient pipeline for streaming and processing large datasets.</a:t>
             </a:r>
-            <a:r>
-              <a:rPr lang="de-CH" dirty="0" err="1"/>
-              <a:t>quantum</a:t>
-            </a:r>
-            <a:r>
-              <a:rPr lang="de-CH" dirty="0"/>
-              <a:t> </a:t>
-            </a:r>
-            <a:r>
-              <a:rPr lang="de-CH" dirty="0" err="1"/>
-              <a:t>gradient</a:t>
-            </a:r>
-            <a:r>
-              <a:rPr lang="de-CH" dirty="0"/>
-              <a:t> </a:t>
-            </a:r>
-            <a:r>
-              <a:rPr lang="de-CH" dirty="0" err="1"/>
-              <a:t>descent</a:t>
-            </a:r>
-            <a:r>
-              <a:rPr lang="de-CH" dirty="0"/>
-              <a:t> </a:t>
-            </a:r>
-            <a:r>
-              <a:rPr lang="de-CH" dirty="0" err="1"/>
-              <a:t>entirely</a:t>
-            </a:r>
-            <a:r>
-              <a:rPr lang="de-CH" dirty="0"/>
-              <a:t>, </a:t>
-            </a:r>
-            <a:r>
-              <a:rPr lang="de-CH" dirty="0" err="1"/>
-              <a:t>offering</a:t>
-            </a:r>
-            <a:r>
-              <a:rPr lang="de-CH" dirty="0"/>
-              <a:t> a </a:t>
-            </a:r>
-            <a:r>
-              <a:rPr lang="de-CH" dirty="0" err="1"/>
-              <a:t>highly</a:t>
-            </a:r>
-            <a:r>
-              <a:rPr lang="de-CH" dirty="0"/>
-              <a:t> </a:t>
-            </a:r>
-            <a:r>
-              <a:rPr lang="de-CH" dirty="0" err="1"/>
-              <a:t>efficient</a:t>
-            </a:r>
-            <a:r>
-              <a:rPr lang="de-CH" dirty="0"/>
-              <a:t> </a:t>
-            </a:r>
-            <a:r>
-              <a:rPr lang="de-CH" dirty="0" err="1"/>
-              <a:t>pipeline</a:t>
-            </a:r>
-            <a:r>
-              <a:rPr lang="de-CH" dirty="0"/>
-              <a:t> </a:t>
-            </a:r>
-            <a:r>
-              <a:rPr lang="de-CH" dirty="0" err="1"/>
-              <a:t>for</a:t>
-            </a:r>
-            <a:r>
-              <a:rPr lang="de-CH" dirty="0"/>
-              <a:t> </a:t>
-            </a:r>
-            <a:r>
-              <a:rPr lang="de-CH" dirty="0" err="1"/>
-              <a:t>streaming</a:t>
-            </a:r>
-            <a:r>
-              <a:rPr lang="de-CH" dirty="0"/>
-              <a:t> and </a:t>
-            </a:r>
-            <a:r>
-              <a:rPr lang="de-CH" dirty="0" err="1"/>
-              <a:t>processing</a:t>
-            </a:r>
-            <a:r>
-              <a:rPr lang="de-CH" dirty="0"/>
-              <a:t> large </a:t>
-            </a:r>
-            <a:r>
-              <a:rPr lang="de-CH" dirty="0" err="1"/>
-              <a:t>datasets</a:t>
-            </a:r>
-            <a:r>
-              <a:rPr lang="de-CH" dirty="0"/>
-              <a:t>.</a:t>
-            </a:r>
-          </a:p>
-          <a:p>
-            <a:endParaRPr lang="de-CH" dirty="0"/>
+          </a:p>
+          <a:p>
+            <a:endParaRPr lang="en-GB" noProof="0" dirty="0"/>
           </a:p>
         </p:txBody>
       </p:sp>
@@ -11823,7 +11602,7 @@
               </a:spcAft>
             </a:pPr>
             <a:r>
-              <a:rPr lang="de-CH" dirty="0">
+              <a:rPr lang="en-GB" noProof="0" dirty="0">
                 <a:solidFill>
                   <a:schemeClr val="tx2"/>
                 </a:solidFill>
@@ -11831,14 +11610,14 @@
               <a:t>Raphael Probst | </a:t>
             </a:r>
             <a:r>
-              <a:rPr lang="de-CH" dirty="0" err="1">
+              <a:rPr lang="en-GB" noProof="0" dirty="0" err="1">
                 <a:solidFill>
                   <a:schemeClr val="tx2"/>
                 </a:solidFill>
               </a:rPr>
               <a:t>probsrap@students.zhaw.zh</a:t>
             </a:r>
-            <a:endParaRPr lang="de-CH" dirty="0">
+            <a:endParaRPr lang="en-GB" noProof="0" dirty="0">
               <a:solidFill>
                 <a:schemeClr val="tx2"/>
               </a:solidFill>
